--- a/최종산출물/4. 포트폴리오/[2조] 26년 5월 30일 멘토링 발표 자료.pptx
+++ b/최종산출물/4. 포트폴리오/[2조] 26년 5월 30일 멘토링 발표 자료.pptx
@@ -109,6 +109,11 @@
       </a:defRPr>
     </a:lvl9pPr>
   </p:defaultTextStyle>
+  <p:extLst>
+    <p:ext uri="{EFAFB233-063F-42B5-8137-9DF3F51BA10A}">
+      <p15:sldGuideLst xmlns:p15="http://schemas.microsoft.com/office/powerpoint/2012/main"/>
+    </p:ext>
+  </p:extLst>
 </p:presentation>
 </file>
 
@@ -4784,19 +4789,15 @@
             </a:pPr>
             <a:r>
               <a:rPr lang="ko-KR" altLang="en-US" sz="1600" dirty="0"/>
-              <a:t>구매 취소</a:t>
+              <a:t>행동 취소</a:t>
+            </a:r>
+            <a:r>
+              <a:rPr lang="en-US" altLang="ko-KR" sz="1600"/>
+              <a:t>(</a:t>
             </a:r>
             <a:r>
               <a:rPr lang="en-US" altLang="ko-KR" sz="1600" dirty="0"/>
-              <a:t>/</a:t>
-            </a:r>
-            <a:r>
-              <a:rPr lang="ko-KR" altLang="en-US" sz="1600" dirty="0"/>
-              <a:t>환불</a:t>
-            </a:r>
-            <a:r>
-              <a:rPr lang="en-US" altLang="ko-KR" sz="1600" dirty="0"/>
-              <a:t>(CANCEL) – </a:t>
+              <a:t>CANCEL) – </a:t>
             </a:r>
             <a:r>
               <a:rPr lang="ko-KR" altLang="en-US" sz="1600" dirty="0"/>
